--- a/docs/quickguides/pptx/12_Quick_Guide_oneSCM_Geschaeftskunden_Kampagnen_und_Sonderfaelle.pptx
+++ b/docs/quickguides/pptx/12_Quick_Guide_oneSCM_Geschaeftskunden_Kampagnen_und_Sonderfaelle.pptx
@@ -1213,11 +1213,11 @@
         <p:spPr>
           <a:xfrm>
             <a:off x="201168" y="713232"/>
-            <a:ext cx="4663440" cy="1472184"/>
+            <a:ext cx="4663440" cy="1581912"/>
           </a:xfrm>
           <a:prstGeom prst="roundRect">
             <a:avLst>
-              <a:gd name="adj" fmla="val 6211"/>
+              <a:gd name="adj" fmla="val 5780"/>
             </a:avLst>
           </a:prstGeom>
           <a:solidFill>
@@ -1281,7 +1281,7 @@
         <p:spPr>
           <a:xfrm>
             <a:off x="310896" y="1060704"/>
-            <a:ext cx="2633472" cy="1069848"/>
+            <a:ext cx="2633472" cy="1179576"/>
           </a:xfrm>
           <a:prstGeom prst="rect">
             <a:avLst/>
@@ -1468,12 +1468,20 @@
           </a:p>
         </p:txBody>
       </p:sp>
-      <p:sp>
-        <p:nvSpPr>
-          <p:cNvPr id="11" name="Screenshot-Rahmen"/>
-          <p:cNvSpPr/>
-          <p:nvPr/>
-        </p:nvSpPr>
+      <p:pic>
+        <p:nvPicPr>
+          <p:cNvPr id="11" name="Kapitelbild" descr="/tmp/claude-0/-home-user-step2-oneSCM/768b354c-b2c6-524c-b102-2abaf010b0fe/scratchpad/qg/src/img/badge_12.png">    </p:cNvPr>
+          <p:cNvPicPr>
+            <a:picLocks noChangeAspect="1"/>
+          </p:cNvPicPr>
+          <p:nvPr/>
+        </p:nvPicPr>
+        <p:blipFill>
+          <a:blip r:embed="rId3"/>
+          <a:stretch>
+            <a:fillRect/>
+          </a:stretch>
+        </p:blipFill>
         <p:spPr>
           <a:xfrm>
             <a:off x="3035808" y="804672"/>
@@ -1482,82 +1490,17 @@
           <a:prstGeom prst="rect">
             <a:avLst/>
           </a:prstGeom>
-          <a:solidFill>
-            <a:srgbClr val="F3F3F3"/>
-          </a:solidFill>
-          <a:ln w="6350">
-            <a:solidFill>
-              <a:srgbClr val="BFBFBF"/>
-            </a:solidFill>
-            <a:prstDash val="solid"/>
-          </a:ln>
-        </p:spPr>
-      </p:sp>
-      <p:sp>
-        <p:nvSpPr>
-          <p:cNvPr id="12" name="Screenshot-Beschriftung"/>
+        </p:spPr>
+      </p:pic>
+      <p:sp>
+        <p:nvSpPr>
+          <p:cNvPr id="12" name="Hinweis"/>
           <p:cNvSpPr txBox="1"/>
           <p:nvPr/>
         </p:nvSpPr>
         <p:spPr>
           <a:xfrm>
-            <a:off x="3035808" y="804672"/>
-            <a:ext cx="1737360" cy="1051560"/>
-          </a:xfrm>
-          <a:prstGeom prst="rect">
-            <a:avLst/>
-          </a:prstGeom>
-          <a:noFill/>
-          <a:ln/>
-        </p:spPr>
-        <p:txBody>
-          <a:bodyPr wrap="square" lIns="50800" tIns="50800" rIns="50800" bIns="50800" rtlCol="0" anchor="ctr"/>
-          <a:lstStyle/>
-          <a:p>
-            <a:pPr algn="ctr" indent="0" marL="0">
-              <a:buNone/>
-            </a:pPr>
-            <a:r>
-              <a:rPr lang="en-US" sz="700" b="1" dirty="0">
-                <a:solidFill>
-                  <a:srgbClr val="404040"/>
-                </a:solidFill>
-                <a:latin typeface="MB Corpo S Text Office" pitchFamily="34" charset="0"/>
-                <a:ea typeface="MB Corpo S Text Office" pitchFamily="34" charset="-122"/>
-                <a:cs typeface="MB Corpo S Text Office" pitchFamily="34" charset="-120"/>
-              </a:rPr>
-              <a:t>Screenshot</a:t>
-            </a:r>
-            <a:endParaRPr lang="en-US" sz="700" dirty="0"/>
-          </a:p>
-          <a:p>
-            <a:pPr algn="ctr" indent="0" marL="0">
-              <a:buNone/>
-            </a:pPr>
-            <a:r>
-              <a:rPr lang="en-US" sz="700" dirty="0">
-                <a:solidFill>
-                  <a:srgbClr val="404040"/>
-                </a:solidFill>
-                <a:latin typeface="MB Corpo S Text Office" pitchFamily="34" charset="0"/>
-                <a:ea typeface="MB Corpo S Text Office" pitchFamily="34" charset="-122"/>
-                <a:cs typeface="MB Corpo S Text Office" pitchFamily="34" charset="-120"/>
-              </a:rPr>
-              <a:t>Kampagnen und Händlerrabatt</a:t>
-            </a:r>
-            <a:endParaRPr lang="en-US" sz="700" dirty="0"/>
-          </a:p>
-        </p:txBody>
-      </p:sp>
-      <p:sp>
-        <p:nvSpPr>
-          <p:cNvPr id="13" name="Hinweis"/>
-          <p:cNvSpPr txBox="1"/>
-          <p:nvPr/>
-        </p:nvSpPr>
-        <p:spPr>
-          <a:xfrm>
-            <a:off x="201168" y="2295144"/>
+            <a:off x="201168" y="2404872"/>
             <a:ext cx="4663440" cy="329184"/>
           </a:xfrm>
           <a:prstGeom prst="rect">
@@ -1590,13 +1533,13 @@
       </p:sp>
       <p:sp>
         <p:nvSpPr>
-          <p:cNvPr id="14" name="Überblick Titel"/>
+          <p:cNvPr id="13" name="Überblick Titel"/>
           <p:cNvSpPr txBox="1"/>
           <p:nvPr/>
         </p:nvSpPr>
         <p:spPr>
           <a:xfrm>
-            <a:off x="201168" y="2734056"/>
+            <a:off x="201168" y="2843784"/>
             <a:ext cx="4663440" cy="256032"/>
           </a:xfrm>
           <a:prstGeom prst="rect">
@@ -1629,13 +1572,13 @@
       </p:sp>
       <p:sp>
         <p:nvSpPr>
-          <p:cNvPr id="15" name="Überblick Spalte"/>
+          <p:cNvPr id="14" name="Überblick Spalte"/>
           <p:cNvSpPr txBox="1"/>
           <p:nvPr/>
         </p:nvSpPr>
         <p:spPr>
           <a:xfrm>
-            <a:off x="201168" y="3008376"/>
+            <a:off x="201168" y="3118104"/>
             <a:ext cx="2240280" cy="1335024"/>
           </a:xfrm>
           <a:prstGeom prst="rect">
@@ -1755,13 +1698,13 @@
       </p:sp>
       <p:sp>
         <p:nvSpPr>
-          <p:cNvPr id="16" name="Überblick Spalte"/>
+          <p:cNvPr id="15" name="Überblick Spalte"/>
           <p:cNvSpPr txBox="1"/>
           <p:nvPr/>
         </p:nvSpPr>
         <p:spPr>
           <a:xfrm>
-            <a:off x="2624328" y="3008376"/>
+            <a:off x="2624328" y="3118104"/>
             <a:ext cx="2240280" cy="1335024"/>
           </a:xfrm>
           <a:prstGeom prst="rect">
@@ -1879,16 +1822,64 @@
           </a:p>
         </p:txBody>
       </p:sp>
-      <p:sp>
-        <p:nvSpPr>
-          <p:cNvPr id="17" name="Abschnittstitel"/>
+      <p:pic>
+        <p:nvPicPr>
+          <p:cNvPr id="16" name="Prozessbild" descr="/tmp/claude-0/-home-user-step2-oneSCM/768b354c-b2c6-524c-b102-2abaf010b0fe/scratchpad/qg/src/img/landscape_12.png">    </p:cNvPr>
+          <p:cNvPicPr>
+            <a:picLocks noChangeAspect="1"/>
+          </p:cNvPicPr>
+          <p:nvPr/>
+        </p:nvPicPr>
+        <p:blipFill>
+          <a:blip r:embed="rId4"/>
+          <a:stretch>
+            <a:fillRect/>
+          </a:stretch>
+        </p:blipFill>
+        <p:spPr>
+          <a:xfrm>
+            <a:off x="201168" y="4562856"/>
+            <a:ext cx="4663440" cy="1207008"/>
+          </a:xfrm>
+          <a:prstGeom prst="rect">
+            <a:avLst/>
+          </a:prstGeom>
+        </p:spPr>
+      </p:pic>
+      <p:pic>
+        <p:nvPicPr>
+          <p:cNvPr id="17" name="Prozessbild" descr="/tmp/claude-0/-home-user-step2-oneSCM/768b354c-b2c6-524c-b102-2abaf010b0fe/scratchpad/qg/src/img/flow_12.png">    </p:cNvPr>
+          <p:cNvPicPr>
+            <a:picLocks noChangeAspect="1"/>
+          </p:cNvPicPr>
+          <p:nvPr/>
+        </p:nvPicPr>
+        <p:blipFill>
+          <a:blip r:embed="rId5"/>
+          <a:stretch>
+            <a:fillRect/>
+          </a:stretch>
+        </p:blipFill>
+        <p:spPr>
+          <a:xfrm>
+            <a:off x="5047488" y="713232"/>
+            <a:ext cx="4663440" cy="1508760"/>
+          </a:xfrm>
+          <a:prstGeom prst="rect">
+            <a:avLst/>
+          </a:prstGeom>
+        </p:spPr>
+      </p:pic>
+      <p:sp>
+        <p:nvSpPr>
+          <p:cNvPr id="18" name="Abschnittstitel"/>
           <p:cNvSpPr txBox="1"/>
           <p:nvPr/>
         </p:nvSpPr>
         <p:spPr>
           <a:xfrm>
-            <a:off x="5047488" y="713232"/>
-            <a:ext cx="2816352" cy="256032"/>
+            <a:off x="5047488" y="2331720"/>
+            <a:ext cx="4663440" cy="256032"/>
           </a:xfrm>
           <a:prstGeom prst="rect">
             <a:avLst/>
@@ -1920,14 +1911,14 @@
       </p:sp>
       <p:sp>
         <p:nvSpPr>
-          <p:cNvPr id="18" name="Schritte"/>
+          <p:cNvPr id="19" name="Schritte"/>
           <p:cNvSpPr txBox="1"/>
           <p:nvPr/>
         </p:nvSpPr>
         <p:spPr>
           <a:xfrm>
-            <a:off x="5065776" y="987552"/>
-            <a:ext cx="2798064" cy="1572768"/>
+            <a:off x="5065776" y="2606040"/>
+            <a:ext cx="4645152" cy="1024128"/>
           </a:xfrm>
           <a:prstGeom prst="rect">
             <a:avLst/>
@@ -2162,99 +2153,18 @@
       </p:sp>
       <p:sp>
         <p:nvSpPr>
-          <p:cNvPr id="19" name="Screenshot-Rahmen"/>
+          <p:cNvPr id="20" name="Warnhinweis"/>
           <p:cNvSpPr/>
           <p:nvPr/>
         </p:nvSpPr>
         <p:spPr>
           <a:xfrm>
-            <a:off x="7973568" y="987552"/>
-            <a:ext cx="1737360" cy="1463040"/>
-          </a:xfrm>
-          <a:prstGeom prst="rect">
-            <a:avLst/>
-          </a:prstGeom>
-          <a:solidFill>
-            <a:srgbClr val="F3F3F3"/>
-          </a:solidFill>
-          <a:ln w="6350">
-            <a:solidFill>
-              <a:srgbClr val="BFBFBF"/>
-            </a:solidFill>
-            <a:prstDash val="solid"/>
-          </a:ln>
-        </p:spPr>
-      </p:sp>
-      <p:sp>
-        <p:nvSpPr>
-          <p:cNvPr id="20" name="Screenshot-Beschriftung"/>
-          <p:cNvSpPr txBox="1"/>
-          <p:nvPr/>
-        </p:nvSpPr>
-        <p:spPr>
-          <a:xfrm>
-            <a:off x="7973568" y="987552"/>
-            <a:ext cx="1737360" cy="1463040"/>
-          </a:xfrm>
-          <a:prstGeom prst="rect">
-            <a:avLst/>
-          </a:prstGeom>
-          <a:noFill/>
-          <a:ln/>
-        </p:spPr>
-        <p:txBody>
-          <a:bodyPr wrap="square" lIns="50800" tIns="50800" rIns="50800" bIns="50800" rtlCol="0" anchor="ctr"/>
-          <a:lstStyle/>
-          <a:p>
-            <a:pPr algn="ctr" indent="0" marL="0">
-              <a:buNone/>
-            </a:pPr>
-            <a:r>
-              <a:rPr lang="en-US" sz="700" b="1" dirty="0">
-                <a:solidFill>
-                  <a:srgbClr val="404040"/>
-                </a:solidFill>
-                <a:latin typeface="MB Corpo S Text Office" pitchFamily="34" charset="0"/>
-                <a:ea typeface="MB Corpo S Text Office" pitchFamily="34" charset="-122"/>
-                <a:cs typeface="MB Corpo S Text Office" pitchFamily="34" charset="-120"/>
-              </a:rPr>
-              <a:t>Screenshot</a:t>
-            </a:r>
-            <a:endParaRPr lang="en-US" sz="700" dirty="0"/>
-          </a:p>
-          <a:p>
-            <a:pPr algn="ctr" indent="0" marL="0">
-              <a:buNone/>
-            </a:pPr>
-            <a:r>
-              <a:rPr lang="en-US" sz="700" dirty="0">
-                <a:solidFill>
-                  <a:srgbClr val="404040"/>
-                </a:solidFill>
-                <a:latin typeface="MB Corpo S Text Office" pitchFamily="34" charset="0"/>
-                <a:ea typeface="MB Corpo S Text Office" pitchFamily="34" charset="-122"/>
-                <a:cs typeface="MB Corpo S Text Office" pitchFamily="34" charset="-120"/>
-              </a:rPr>
-              <a:t>Sonderfallanfrage</a:t>
-            </a:r>
-            <a:endParaRPr lang="en-US" sz="700" dirty="0"/>
-          </a:p>
-        </p:txBody>
-      </p:sp>
-      <p:sp>
-        <p:nvSpPr>
-          <p:cNvPr id="21" name="Warnhinweis"/>
-          <p:cNvSpPr/>
-          <p:nvPr/>
-        </p:nvSpPr>
-        <p:spPr>
-          <a:xfrm>
-            <a:off x="5047488" y="2670048"/>
-            <a:ext cx="4663440" cy="612648"/>
+            <a:off x="5047488" y="3739896"/>
+            <a:ext cx="4663440" cy="475488"/>
           </a:xfrm>
           <a:prstGeom prst="roundRect">
             <a:avLst>
-              <a:gd name="adj" fmla="val 11940"/>
+              <a:gd name="adj" fmla="val 15385"/>
             </a:avLst>
           </a:prstGeom>
           <a:solidFill>
@@ -2270,14 +2180,14 @@
       </p:sp>
       <p:sp>
         <p:nvSpPr>
-          <p:cNvPr id="22" name="Warnzeichen"/>
+          <p:cNvPr id="21" name="Warnzeichen"/>
           <p:cNvSpPr txBox="1"/>
           <p:nvPr/>
         </p:nvSpPr>
         <p:spPr>
           <a:xfrm>
-            <a:off x="5120640" y="2670048"/>
-            <a:ext cx="274320" cy="612648"/>
+            <a:off x="5120640" y="3739896"/>
+            <a:ext cx="274320" cy="475488"/>
           </a:xfrm>
           <a:prstGeom prst="rect">
             <a:avLst/>
@@ -2309,14 +2219,14 @@
       </p:sp>
       <p:sp>
         <p:nvSpPr>
-          <p:cNvPr id="23" name="Warntext"/>
+          <p:cNvPr id="22" name="Warntext"/>
           <p:cNvSpPr txBox="1"/>
           <p:nvPr/>
         </p:nvSpPr>
         <p:spPr>
           <a:xfrm>
-            <a:off x="5458968" y="2670048"/>
-            <a:ext cx="4160520" cy="612648"/>
+            <a:off x="5458968" y="3739896"/>
+            <a:ext cx="4160520" cy="475488"/>
           </a:xfrm>
           <a:prstGeom prst="rect">
             <a:avLst/>
@@ -2359,14 +2269,14 @@
       </p:sp>
       <p:sp>
         <p:nvSpPr>
-          <p:cNvPr id="24" name="Schritte"/>
+          <p:cNvPr id="23" name="Schritte"/>
           <p:cNvSpPr txBox="1"/>
           <p:nvPr/>
         </p:nvSpPr>
         <p:spPr>
           <a:xfrm>
-            <a:off x="5065776" y="3392424"/>
-            <a:ext cx="4645152" cy="1024128"/>
+            <a:off x="5065776" y="4325112"/>
+            <a:ext cx="4645152" cy="886968"/>
           </a:xfrm>
           <a:prstGeom prst="rect">
             <a:avLst/>
@@ -2836,11 +2746,11 @@
         <p:spPr>
           <a:xfrm>
             <a:off x="201168" y="713232"/>
-            <a:ext cx="4663440" cy="2103120"/>
+            <a:ext cx="4663440" cy="2258568"/>
           </a:xfrm>
           <a:prstGeom prst="roundRect">
             <a:avLst>
-              <a:gd name="adj" fmla="val 4348"/>
+              <a:gd name="adj" fmla="val 4049"/>
             </a:avLst>
           </a:prstGeom>
           <a:solidFill>
@@ -2904,7 +2814,7 @@
         <p:spPr>
           <a:xfrm>
             <a:off x="310896" y="1060704"/>
-            <a:ext cx="4480560" cy="1700784"/>
+            <a:ext cx="4480560" cy="1856232"/>
           </a:xfrm>
           <a:prstGeom prst="rect">
             <a:avLst/>
@@ -3144,12 +3054,12 @@
         </p:nvSpPr>
         <p:spPr>
           <a:xfrm>
-            <a:off x="201168" y="2926080"/>
-            <a:ext cx="4663440" cy="1115568"/>
+            <a:off x="201168" y="3081528"/>
+            <a:ext cx="4663440" cy="1197864"/>
           </a:xfrm>
           <a:prstGeom prst="roundRect">
             <a:avLst>
-              <a:gd name="adj" fmla="val 8197"/>
+              <a:gd name="adj" fmla="val 7634"/>
             </a:avLst>
           </a:prstGeom>
           <a:solidFill>
@@ -3173,7 +3083,7 @@
         </p:nvSpPr>
         <p:spPr>
           <a:xfrm>
-            <a:off x="310896" y="2999232"/>
+            <a:off x="310896" y="3154680"/>
             <a:ext cx="4480560" cy="256032"/>
           </a:xfrm>
           <a:prstGeom prst="rect">
@@ -3212,8 +3122,8 @@
         </p:nvSpPr>
         <p:spPr>
           <a:xfrm>
-            <a:off x="310896" y="3273552"/>
-            <a:ext cx="4480560" cy="713232"/>
+            <a:off x="310896" y="3429000"/>
+            <a:ext cx="4480560" cy="795528"/>
           </a:xfrm>
           <a:prstGeom prst="rect">
             <a:avLst/>
@@ -3318,12 +3228,12 @@
         </p:nvSpPr>
         <p:spPr>
           <a:xfrm>
-            <a:off x="201168" y="4151376"/>
-            <a:ext cx="4663440" cy="1088136"/>
+            <a:off x="201168" y="4389120"/>
+            <a:ext cx="4663440" cy="1170432"/>
           </a:xfrm>
           <a:prstGeom prst="roundRect">
             <a:avLst>
-              <a:gd name="adj" fmla="val 8403"/>
+              <a:gd name="adj" fmla="val 7813"/>
             </a:avLst>
           </a:prstGeom>
           <a:solidFill>
@@ -3347,7 +3257,7 @@
         </p:nvSpPr>
         <p:spPr>
           <a:xfrm>
-            <a:off x="310896" y="4224528"/>
+            <a:off x="310896" y="4462272"/>
             <a:ext cx="4480560" cy="256032"/>
           </a:xfrm>
           <a:prstGeom prst="rect">
@@ -3386,8 +3296,8 @@
         </p:nvSpPr>
         <p:spPr>
           <a:xfrm>
-            <a:off x="310896" y="4498848"/>
-            <a:ext cx="4480560" cy="685800"/>
+            <a:off x="310896" y="4736592"/>
+            <a:ext cx="4480560" cy="768096"/>
           </a:xfrm>
           <a:prstGeom prst="rect">
             <a:avLst/>
@@ -3639,11 +3549,11 @@
         <p:spPr>
           <a:xfrm>
             <a:off x="5047488" y="2221992"/>
-            <a:ext cx="4663440" cy="1527048"/>
+            <a:ext cx="4663440" cy="1636776"/>
           </a:xfrm>
           <a:prstGeom prst="roundRect">
             <a:avLst>
-              <a:gd name="adj" fmla="val 5988"/>
+              <a:gd name="adj" fmla="val 5587"/>
             </a:avLst>
           </a:prstGeom>
           <a:solidFill>
@@ -3707,7 +3617,7 @@
         <p:spPr>
           <a:xfrm>
             <a:off x="5157216" y="2569464"/>
-            <a:ext cx="4480560" cy="1124712"/>
+            <a:ext cx="4480560" cy="1234440"/>
           </a:xfrm>
           <a:prstGeom prst="rect">
             <a:avLst/>

--- a/docs/quickguides/pptx/12_Quick_Guide_oneSCM_Geschaeftskunden_Kampagnen_und_Sonderfaelle.pptx
+++ b/docs/quickguides/pptx/12_Quick_Guide_oneSCM_Geschaeftskunden_Kampagnen_und_Sonderfaelle.pptx
@@ -1159,7 +1159,7 @@
                 <a:ea typeface="MB Corpo S Text Office" pitchFamily="34" charset="-122"/>
                 <a:cs typeface="MB Corpo S Text Office" pitchFamily="34" charset="-120"/>
               </a:rPr>
-              <a:t>: Dieser Quick Guide fasst Kapitel 12 des oneSCM-Handbuchs zusammen. Details, Bildschirmbilder und Nachweise finden Sie im Handbuchkapitel.</a:t>
+              <a:t>: Dieser Quick Guide fasst Kapitel 12 des oneSCM-Handbuchs zusammen. Details, Bildschirmbilder und Nachweise finden Sie im Handbuch.</a:t>
             </a:r>
             <a:endParaRPr lang="en-US" sz="800" dirty="0"/>
           </a:p>
@@ -2692,7 +2692,7 @@
                 <a:ea typeface="MB Corpo S Text Office" pitchFamily="34" charset="-122"/>
                 <a:cs typeface="MB Corpo S Text Office" pitchFamily="34" charset="-120"/>
               </a:rPr>
-              <a:t>: Dieser Quick Guide fasst Kapitel 12 des oneSCM-Handbuchs zusammen. Details, Bildschirmbilder und Nachweise finden Sie im Handbuchkapitel.</a:t>
+              <a:t>: Dieser Quick Guide fasst Kapitel 12 des oneSCM-Handbuchs zusammen. Details, Bildschirmbilder und Nachweise finden Sie im Handbuch.</a:t>
             </a:r>
             <a:endParaRPr lang="en-US" sz="800" dirty="0"/>
           </a:p>

--- a/docs/quickguides/pptx/12_Quick_Guide_oneSCM_Geschaeftskunden_Kampagnen_und_Sonderfaelle.pptx
+++ b/docs/quickguides/pptx/12_Quick_Guide_oneSCM_Geschaeftskunden_Kampagnen_und_Sonderfaelle.pptx
@@ -1525,7 +1525,7 @@
                 <a:ea typeface="MB Corpo S Text Office" pitchFamily="34" charset="-122"/>
                 <a:cs typeface="MB Corpo S Text Office" pitchFamily="34" charset="-120"/>
               </a:rPr>
-              <a:t>Dieses Dokument ist interaktiv – Verweise auf Handbuchkapitel und Systeme sind als Links hinterlegt.</a:t>
+              <a:t>Verweise auf Handbuchkapitel und Systeme sind hervorgehoben; E-Mail-Adressen sind als Links hinterlegt.</a:t>
             </a:r>
             <a:endParaRPr lang="en-US" sz="900" dirty="0"/>
           </a:p>
@@ -1579,7 +1579,7 @@
         <p:spPr>
           <a:xfrm>
             <a:off x="201168" y="3118104"/>
-            <a:ext cx="2240280" cy="1335024"/>
+            <a:ext cx="2240280" cy="1362456"/>
           </a:xfrm>
           <a:prstGeom prst="rect">
             <a:avLst/>
@@ -1705,7 +1705,7 @@
         <p:spPr>
           <a:xfrm>
             <a:off x="2624328" y="3118104"/>
-            <a:ext cx="2240280" cy="1335024"/>
+            <a:ext cx="2240280" cy="1362456"/>
           </a:xfrm>
           <a:prstGeom prst="rect">
             <a:avLst/>
@@ -1732,7 +1732,7 @@
                 <a:ea typeface="MB Corpo S Text Office" pitchFamily="34" charset="-122"/>
                 <a:cs typeface="MB Corpo S Text Office" pitchFamily="34" charset="-120"/>
               </a:rPr>
-              <a:t>12.5 – 12.8 Bearbeitung</a:t>
+              <a:t>12.5 – 12.9 Bearbeitung</a:t>
             </a:r>
             <a:endParaRPr lang="en-US" sz="900" dirty="0"/>
           </a:p>
@@ -1817,6 +1817,27 @@
                 <a:cs typeface="MB Corpo S Text Office" pitchFamily="34" charset="-120"/>
               </a:rPr>
               <a:t>Customer Account Center</a:t>
+            </a:r>
+            <a:endParaRPr lang="en-US" sz="900" dirty="0"/>
+          </a:p>
+          <a:p>
+            <a:pPr marL="152400" indent="-152400">
+              <a:spcAft>
+                <a:spcPts val="100"/>
+              </a:spcAft>
+              <a:buSzPct val="100000"/>
+              <a:buChar char="•"/>
+            </a:pPr>
+            <a:r>
+              <a:rPr lang="en-US" sz="900" dirty="0">
+                <a:solidFill>
+                  <a:srgbClr val="262626"/>
+                </a:solidFill>
+                <a:latin typeface="MB Corpo S Text Office" pitchFamily="34" charset="0"/>
+                <a:ea typeface="MB Corpo S Text Office" pitchFamily="34" charset="-122"/>
+                <a:cs typeface="MB Corpo S Text Office" pitchFamily="34" charset="-120"/>
+              </a:rPr>
+              <a:t>Massenanlage und Validierung von Fahrzeuglisten</a:t>
             </a:r>
             <a:endParaRPr lang="en-US" sz="900" dirty="0"/>
           </a:p>
@@ -1838,7 +1859,7 @@
         </p:blipFill>
         <p:spPr>
           <a:xfrm>
-            <a:off x="201168" y="4562856"/>
+            <a:off x="201168" y="4590288"/>
             <a:ext cx="4663440" cy="1207008"/>
           </a:xfrm>
           <a:prstGeom prst="rect">
@@ -1918,7 +1939,7 @@
         <p:spPr>
           <a:xfrm>
             <a:off x="5065776" y="2606040"/>
-            <a:ext cx="4645152" cy="1024128"/>
+            <a:ext cx="4645152" cy="1344168"/>
           </a:xfrm>
           <a:prstGeom prst="rect">
             <a:avLst/>
@@ -2149,6 +2170,72 @@
             </a:r>
             <a:endParaRPr lang="en-US" sz="900" dirty="0"/>
           </a:p>
+          <a:p>
+            <a:pPr marL="203200" indent="-203200">
+              <a:spcAft>
+                <a:spcPts val="400"/>
+              </a:spcAft>
+              <a:buSzPct val="100000"/>
+              <a:buFont typeface="+mj-lt"/>
+              <a:buAutoNum type="arabicPeriod" startAt="4"/>
+            </a:pPr>
+            <a:r>
+              <a:rPr lang="en-US" sz="900" dirty="0">
+                <a:solidFill>
+                  <a:srgbClr val="262626"/>
+                </a:solidFill>
+                <a:latin typeface="MB Corpo S Text Office" pitchFamily="34" charset="0"/>
+                <a:ea typeface="MB Corpo S Text Office" pitchFamily="34" charset="-122"/>
+                <a:cs typeface="MB Corpo S Text Office" pitchFamily="34" charset="-120"/>
+              </a:rPr>
+              <a:t>Die Anfrage wird dem zuständigen </a:t>
+            </a:r>
+            <a:r>
+              <a:rPr lang="en-US" sz="900" b="1" dirty="0">
+                <a:solidFill>
+                  <a:srgbClr val="262626"/>
+                </a:solidFill>
+                <a:latin typeface="MB Corpo S Text Office" pitchFamily="34" charset="0"/>
+                <a:ea typeface="MB Corpo S Text Office" pitchFamily="34" charset="-122"/>
+                <a:cs typeface="MB Corpo S Text Office" pitchFamily="34" charset="-120"/>
+              </a:rPr>
+              <a:t>Dealer</a:t>
+            </a:r>
+            <a:r>
+              <a:rPr lang="en-US" sz="900" dirty="0">
+                <a:solidFill>
+                  <a:srgbClr val="262626"/>
+                </a:solidFill>
+                <a:latin typeface="MB Corpo S Text Office" pitchFamily="34" charset="0"/>
+                <a:ea typeface="MB Corpo S Text Office" pitchFamily="34" charset="-122"/>
+                <a:cs typeface="MB Corpo S Text Office" pitchFamily="34" charset="-120"/>
+              </a:rPr>
+              <a:t> bzw. Bearbeiter zugeordnet (12.5) und durch MO oder Markt </a:t>
+            </a:r>
+            <a:r>
+              <a:rPr lang="en-US" sz="900" b="1" dirty="0">
+                <a:solidFill>
+                  <a:srgbClr val="262626"/>
+                </a:solidFill>
+                <a:latin typeface="MB Corpo S Text Office" pitchFamily="34" charset="0"/>
+                <a:ea typeface="MB Corpo S Text Office" pitchFamily="34" charset="-122"/>
+                <a:cs typeface="MB Corpo S Text Office" pitchFamily="34" charset="-120"/>
+              </a:rPr>
+              <a:t>validiert, freigegeben oder abgelehnt</a:t>
+            </a:r>
+            <a:r>
+              <a:rPr lang="en-US" sz="900" dirty="0">
+                <a:solidFill>
+                  <a:srgbClr val="262626"/>
+                </a:solidFill>
+                <a:latin typeface="MB Corpo S Text Office" pitchFamily="34" charset="0"/>
+                <a:ea typeface="MB Corpo S Text Office" pitchFamily="34" charset="-122"/>
+                <a:cs typeface="MB Corpo S Text Office" pitchFamily="34" charset="-120"/>
+              </a:rPr>
+              <a:t> (12.6).</a:t>
+            </a:r>
+            <a:endParaRPr lang="en-US" sz="900" dirty="0"/>
+          </a:p>
         </p:txBody>
       </p:sp>
       <p:sp>
@@ -2159,7 +2246,7 @@
         </p:nvSpPr>
         <p:spPr>
           <a:xfrm>
-            <a:off x="5047488" y="3739896"/>
+            <a:off x="5047488" y="4059936"/>
             <a:ext cx="4663440" cy="475488"/>
           </a:xfrm>
           <a:prstGeom prst="roundRect">
@@ -2186,7 +2273,7 @@
         </p:nvSpPr>
         <p:spPr>
           <a:xfrm>
-            <a:off x="5120640" y="3739896"/>
+            <a:off x="5120640" y="4059936"/>
             <a:ext cx="274320" cy="475488"/>
           </a:xfrm>
           <a:prstGeom prst="rect">
@@ -2225,7 +2312,7 @@
         </p:nvSpPr>
         <p:spPr>
           <a:xfrm>
-            <a:off x="5458968" y="3739896"/>
+            <a:off x="5458968" y="4059936"/>
             <a:ext cx="4160520" cy="475488"/>
           </a:xfrm>
           <a:prstGeom prst="rect">
@@ -2275,8 +2362,8 @@
         </p:nvSpPr>
         <p:spPr>
           <a:xfrm>
-            <a:off x="5065776" y="4325112"/>
-            <a:ext cx="4645152" cy="886968"/>
+            <a:off x="5065776" y="4645152"/>
+            <a:ext cx="4645152" cy="1024128"/>
           </a:xfrm>
           <a:prstGeom prst="rect">
             <a:avLst/>
@@ -2294,72 +2381,6 @@
               </a:spcAft>
               <a:buSzPct val="100000"/>
               <a:buFont typeface="+mj-lt"/>
-              <a:buAutoNum type="arabicPeriod" startAt="4"/>
-            </a:pPr>
-            <a:r>
-              <a:rPr lang="en-US" sz="900" dirty="0">
-                <a:solidFill>
-                  <a:srgbClr val="262626"/>
-                </a:solidFill>
-                <a:latin typeface="MB Corpo S Text Office" pitchFamily="34" charset="0"/>
-                <a:ea typeface="MB Corpo S Text Office" pitchFamily="34" charset="-122"/>
-                <a:cs typeface="MB Corpo S Text Office" pitchFamily="34" charset="-120"/>
-              </a:rPr>
-              <a:t>Die Anfrage wird dem zuständigen </a:t>
-            </a:r>
-            <a:r>
-              <a:rPr lang="en-US" sz="900" b="1" dirty="0">
-                <a:solidFill>
-                  <a:srgbClr val="262626"/>
-                </a:solidFill>
-                <a:latin typeface="MB Corpo S Text Office" pitchFamily="34" charset="0"/>
-                <a:ea typeface="MB Corpo S Text Office" pitchFamily="34" charset="-122"/>
-                <a:cs typeface="MB Corpo S Text Office" pitchFamily="34" charset="-120"/>
-              </a:rPr>
-              <a:t>Dealer</a:t>
-            </a:r>
-            <a:r>
-              <a:rPr lang="en-US" sz="900" dirty="0">
-                <a:solidFill>
-                  <a:srgbClr val="262626"/>
-                </a:solidFill>
-                <a:latin typeface="MB Corpo S Text Office" pitchFamily="34" charset="0"/>
-                <a:ea typeface="MB Corpo S Text Office" pitchFamily="34" charset="-122"/>
-                <a:cs typeface="MB Corpo S Text Office" pitchFamily="34" charset="-120"/>
-              </a:rPr>
-              <a:t> bzw. Bearbeiter zugeordnet (12.5) und durch MO oder Markt </a:t>
-            </a:r>
-            <a:r>
-              <a:rPr lang="en-US" sz="900" b="1" dirty="0">
-                <a:solidFill>
-                  <a:srgbClr val="262626"/>
-                </a:solidFill>
-                <a:latin typeface="MB Corpo S Text Office" pitchFamily="34" charset="0"/>
-                <a:ea typeface="MB Corpo S Text Office" pitchFamily="34" charset="-122"/>
-                <a:cs typeface="MB Corpo S Text Office" pitchFamily="34" charset="-120"/>
-              </a:rPr>
-              <a:t>validiert, freigegeben oder abgelehnt</a:t>
-            </a:r>
-            <a:r>
-              <a:rPr lang="en-US" sz="900" dirty="0">
-                <a:solidFill>
-                  <a:srgbClr val="262626"/>
-                </a:solidFill>
-                <a:latin typeface="MB Corpo S Text Office" pitchFamily="34" charset="0"/>
-                <a:ea typeface="MB Corpo S Text Office" pitchFamily="34" charset="-122"/>
-                <a:cs typeface="MB Corpo S Text Office" pitchFamily="34" charset="-120"/>
-              </a:rPr>
-              <a:t> (12.6).</a:t>
-            </a:r>
-            <a:endParaRPr lang="en-US" sz="900" dirty="0"/>
-          </a:p>
-          <a:p>
-            <a:pPr marL="203200" indent="-203200">
-              <a:spcAft>
-                <a:spcPts val="400"/>
-              </a:spcAft>
-              <a:buSzPct val="100000"/>
-              <a:buFont typeface="+mj-lt"/>
               <a:buAutoNum type="arabicPeriod" startAt="5"/>
             </a:pPr>
             <a:r>
@@ -2460,6 +2481,50 @@
                 <a:cs typeface="MB Corpo S Text Office" pitchFamily="34" charset="-120"/>
               </a:rPr>
               <a:t> (12.8).</a:t>
+            </a:r>
+            <a:endParaRPr lang="en-US" sz="900" dirty="0"/>
+          </a:p>
+          <a:p>
+            <a:pPr marL="203200" indent="-203200">
+              <a:spcAft>
+                <a:spcPts val="400"/>
+              </a:spcAft>
+              <a:buSzPct val="100000"/>
+              <a:buFont typeface="+mj-lt"/>
+              <a:buAutoNum type="arabicPeriod" startAt="7"/>
+            </a:pPr>
+            <a:r>
+              <a:rPr lang="en-US" sz="900" dirty="0">
+                <a:solidFill>
+                  <a:srgbClr val="262626"/>
+                </a:solidFill>
+                <a:latin typeface="MB Corpo S Text Office" pitchFamily="34" charset="0"/>
+                <a:ea typeface="MB Corpo S Text Office" pitchFamily="34" charset="-122"/>
+                <a:cs typeface="MB Corpo S Text Office" pitchFamily="34" charset="-120"/>
+              </a:rPr>
+              <a:t>Für Flotten übergeben Sie Fahrzeuglisten an die </a:t>
+            </a:r>
+            <a:r>
+              <a:rPr lang="en-US" sz="900" b="1" dirty="0">
+                <a:solidFill>
+                  <a:srgbClr val="262626"/>
+                </a:solidFill>
+                <a:latin typeface="MB Corpo S Text Office" pitchFamily="34" charset="0"/>
+                <a:ea typeface="MB Corpo S Text Office" pitchFamily="34" charset="-122"/>
+                <a:cs typeface="MB Corpo S Text Office" pitchFamily="34" charset="-120"/>
+              </a:rPr>
+              <a:t>Massenanlage</a:t>
+            </a:r>
+            <a:r>
+              <a:rPr lang="en-US" sz="900" dirty="0">
+                <a:solidFill>
+                  <a:srgbClr val="262626"/>
+                </a:solidFill>
+                <a:latin typeface="MB Corpo S Text Office" pitchFamily="34" charset="0"/>
+                <a:ea typeface="MB Corpo S Text Office" pitchFamily="34" charset="-122"/>
+                <a:cs typeface="MB Corpo S Text Office" pitchFamily="34" charset="-120"/>
+              </a:rPr>
+              <a:t>; das System prüft je Fahrzeug Produkt, Erstzulassung und Laufleistung und benachrichtigt Händler, MO und MPC über die Ergebnistabelle (12.9).</a:t>
             </a:r>
             <a:endParaRPr lang="en-US" sz="900" dirty="0"/>
           </a:p>
